--- a/examples/project-structure.pptx
+++ b/examples/project-structure.pptx
@@ -7,7 +7,7 @@
   <p:sldIdLst>
     <p:sldId id="256" r:id="rId7"/>
   </p:sldIdLst>
-  <p:sldSz cx="5740082" cy="2021681" type="screen4x3"/>
+  <p:sldSz cx="5983468" cy="2021681" type="screen4x3"/>
   <p:notesSz cx="6858000" cy="9144000"/>
   <p:defaultTextStyle>
     <a:defPPr>
@@ -3096,8 +3096,8 @@
         </p:nvSpPr>
         <p:spPr>
           <a:xfrm>
-            <a:off x="1549757" y="137160"/>
-            <a:ext cx="1149945" cy="233362"/>
+            <a:off x="1552609" y="137160"/>
+            <a:ext cx="1191388" cy="233362"/>
           </a:xfrm>
           <a:prstGeom prst="rect">
             <a:avLst/>
@@ -3108,6 +3108,7 @@
               <a:srgbClr val="000000"/>
             </a:solidFill>
           </a:ln>
+          <a:effectLst/>
         </p:spPr>
         <p:style>
           <a:lnRef idx="1">
@@ -3124,7 +3125,7 @@
           </a:fontRef>
         </p:style>
         <p:txBody>
-          <a:bodyPr rtlCol="0" anchor="ctr" wrap="none" lIns="0" rIns="0" tIns="0" bIns="0"/>
+          <a:bodyPr rtlCol="0" anchor="ctr" wrap="none" tIns="0" bIns="0"/>
           <a:lstStyle/>
           <a:p>
             <a:pPr algn="ctr"/>
@@ -3149,7 +3150,7 @@
         </p:nvCxnSpPr>
         <p:spPr>
           <a:xfrm>
-            <a:off x="2124729" y="370522"/>
+            <a:off x="2148304" y="370522"/>
             <a:ext cx="0" cy="365760"/>
           </a:xfrm>
           <a:prstGeom prst="line">
@@ -3162,6 +3163,7 @@
             <a:headEnd type="none"/>
             <a:tailEnd type="none"/>
           </a:ln>
+          <a:effectLst/>
         </p:spPr>
         <p:style>
           <a:lnRef idx="2">
@@ -3186,8 +3188,8 @@
         </p:nvSpPr>
         <p:spPr>
           <a:xfrm>
-            <a:off x="1609982" y="736282"/>
-            <a:ext cx="1029493" cy="233362"/>
+            <a:off x="1607217" y="736282"/>
+            <a:ext cx="1082173" cy="233362"/>
           </a:xfrm>
           <a:prstGeom prst="rect">
             <a:avLst/>
@@ -3198,6 +3200,7 @@
               <a:srgbClr val="000000"/>
             </a:solidFill>
           </a:ln>
+          <a:effectLst/>
         </p:spPr>
         <p:style>
           <a:lnRef idx="1">
@@ -3214,7 +3217,7 @@
           </a:fontRef>
         </p:style>
         <p:txBody>
-          <a:bodyPr rtlCol="0" anchor="ctr" wrap="none" lIns="0" rIns="0" tIns="0" bIns="0"/>
+          <a:bodyPr rtlCol="0" anchor="ctr" wrap="none" tIns="0" bIns="0"/>
           <a:lstStyle/>
           <a:p>
             <a:pPr algn="ctr"/>
@@ -3240,7 +3243,7 @@
         <p:spPr>
           <a:xfrm>
             <a:off x="137160" y="1517808"/>
-            <a:ext cx="866179" cy="366712"/>
+            <a:ext cx="913328" cy="366712"/>
           </a:xfrm>
           <a:prstGeom prst="rect">
             <a:avLst/>
@@ -3251,6 +3254,7 @@
               <a:srgbClr val="000000"/>
             </a:solidFill>
           </a:ln>
+          <a:effectLst/>
         </p:spPr>
         <p:style>
           <a:lnRef idx="1">
@@ -3267,7 +3271,7 @@
           </a:fontRef>
         </p:style>
         <p:txBody>
-          <a:bodyPr rtlCol="0" anchor="ctr" wrap="none" lIns="0" rIns="0" tIns="0" bIns="0"/>
+          <a:bodyPr rtlCol="0" anchor="ctr" wrap="none" tIns="0" bIns="0"/>
           <a:lstStyle/>
           <a:p>
             <a:pPr algn="ctr"/>
@@ -3305,8 +3309,8 @@
         </p:nvSpPr>
         <p:spPr>
           <a:xfrm>
-            <a:off x="1460539" y="1517808"/>
-            <a:ext cx="866179" cy="366712"/>
+            <a:off x="1507688" y="1517808"/>
+            <a:ext cx="913328" cy="366712"/>
           </a:xfrm>
           <a:prstGeom prst="rect">
             <a:avLst/>
@@ -3317,6 +3321,7 @@
               <a:srgbClr val="000000"/>
             </a:solidFill>
           </a:ln>
+          <a:effectLst/>
         </p:spPr>
         <p:style>
           <a:lnRef idx="1">
@@ -3333,7 +3338,7 @@
           </a:fontRef>
         </p:style>
         <p:txBody>
-          <a:bodyPr rtlCol="0" anchor="ctr" wrap="square" lIns="0" rIns="0" tIns="0" bIns="0"/>
+          <a:bodyPr rtlCol="0" anchor="ctr" wrap="square" tIns="0" bIns="0"/>
           <a:lstStyle/>
           <a:p>
             <a:pPr algn="ctr"/>
@@ -3371,8 +3376,8 @@
         </p:nvSpPr>
         <p:spPr>
           <a:xfrm>
-            <a:off x="2783919" y="1517808"/>
-            <a:ext cx="866179" cy="366712"/>
+            <a:off x="2878216" y="1517808"/>
+            <a:ext cx="913328" cy="366712"/>
           </a:xfrm>
           <a:prstGeom prst="rect">
             <a:avLst/>
@@ -3383,6 +3388,7 @@
               <a:srgbClr val="000000"/>
             </a:solidFill>
           </a:ln>
+          <a:effectLst/>
         </p:spPr>
         <p:style>
           <a:lnRef idx="1">
@@ -3399,7 +3405,7 @@
           </a:fontRef>
         </p:style>
         <p:txBody>
-          <a:bodyPr rtlCol="0" anchor="ctr" wrap="square" lIns="0" rIns="0" tIns="0" bIns="0"/>
+          <a:bodyPr rtlCol="0" anchor="ctr" wrap="square" tIns="0" bIns="0"/>
           <a:lstStyle/>
           <a:p>
             <a:pPr algn="ctr"/>
@@ -3437,8 +3443,8 @@
         </p:nvSpPr>
         <p:spPr>
           <a:xfrm>
-            <a:off x="4107299" y="1517808"/>
-            <a:ext cx="866179" cy="366712"/>
+            <a:off x="4248745" y="1517808"/>
+            <a:ext cx="913328" cy="366712"/>
           </a:xfrm>
           <a:prstGeom prst="rect">
             <a:avLst/>
@@ -3449,6 +3455,7 @@
               <a:srgbClr val="000000"/>
             </a:solidFill>
           </a:ln>
+          <a:effectLst/>
         </p:spPr>
         <p:style>
           <a:lnRef idx="1">
@@ -3465,7 +3472,7 @@
           </a:fontRef>
         </p:style>
         <p:txBody>
-          <a:bodyPr rtlCol="0" anchor="ctr" wrap="square" lIns="0" rIns="0" tIns="0" bIns="0"/>
+          <a:bodyPr rtlCol="0" anchor="ctr" wrap="square" tIns="0" bIns="0"/>
           <a:lstStyle/>
           <a:p>
             <a:pPr algn="ctr"/>
@@ -3503,8 +3510,8 @@
         </p:nvSpPr>
         <p:spPr>
           <a:xfrm>
-            <a:off x="5258435" y="1035843"/>
-            <a:ext cx="344487" cy="233362"/>
+            <a:off x="5392238" y="1035843"/>
+            <a:ext cx="454069" cy="233362"/>
           </a:xfrm>
           <a:prstGeom prst="rect">
             <a:avLst/>
@@ -3515,6 +3522,7 @@
               <a:srgbClr val="000000"/>
             </a:solidFill>
           </a:ln>
+          <a:effectLst/>
         </p:spPr>
         <p:style>
           <a:lnRef idx="1">
@@ -3531,7 +3539,7 @@
           </a:fontRef>
         </p:style>
         <p:txBody>
-          <a:bodyPr rtlCol="0" anchor="ctr" wrap="none" lIns="0" rIns="0" tIns="0" bIns="0"/>
+          <a:bodyPr rtlCol="0" anchor="ctr" wrap="none" tIns="0" bIns="0"/>
           <a:lstStyle/>
           <a:p>
             <a:pPr algn="ctr"/>
@@ -3556,8 +3564,8 @@
         </p:nvSpPr>
         <p:spPr>
           <a:xfrm>
-            <a:off x="2124729" y="969645"/>
-            <a:ext cx="3133706" cy="182880"/>
+            <a:off x="2148304" y="969645"/>
+            <a:ext cx="3243934" cy="182880"/>
           </a:xfrm>
           <a:custGeom>
             <a:avLst/>
@@ -3566,7 +3574,7 @@
             <a:cxnLst/>
             <a:rect l="l" t="t" r="r" b="b"/>
             <a:pathLst>
-              <a:path w="3133706" h="182880">
+              <a:path w="3243934" h="182880">
                 <a:moveTo>
                   <a:pt x="0" y="0"/>
                 </a:moveTo>
@@ -3574,7 +3582,7 @@
                   <a:pt x="0" y="182880"/>
                 </a:lnTo>
                 <a:lnTo>
-                  <a:pt x="3133706" y="182880"/>
+                  <a:pt x="3243934" y="182880"/>
                 </a:lnTo>
               </a:path>
             </a:pathLst>
@@ -3587,6 +3595,7 @@
             <a:headEnd type="none"/>
             <a:tailEnd type="none"/>
           </a:ln>
+          <a:effectLst/>
         </p:spPr>
         <p:style>
           <a:lnRef idx="1">
@@ -3618,7 +3627,7 @@
         </p:nvSpPr>
         <p:spPr>
           <a:xfrm>
-            <a:off x="570249" y="969645"/>
+            <a:off x="593824" y="969645"/>
             <a:ext cx="1554480" cy="548163"/>
           </a:xfrm>
           <a:custGeom>
@@ -3652,6 +3661,7 @@
             <a:headEnd type="none"/>
             <a:tailEnd type="none"/>
           </a:ln>
+          <a:effectLst/>
         </p:spPr>
         <p:style>
           <a:lnRef idx="1">
@@ -3683,8 +3693,8 @@
         </p:nvSpPr>
         <p:spPr>
           <a:xfrm>
-            <a:off x="1893629" y="969645"/>
-            <a:ext cx="231100" cy="548163"/>
+            <a:off x="1964352" y="969645"/>
+            <a:ext cx="183952" cy="548163"/>
           </a:xfrm>
           <a:custGeom>
             <a:avLst/>
@@ -3693,12 +3703,12 @@
             <a:cxnLst/>
             <a:rect l="l" t="t" r="r" b="b"/>
             <a:pathLst>
-              <a:path w="231100" h="548163">
+              <a:path w="183952" h="548163">
                 <a:moveTo>
-                  <a:pt x="231100" y="0"/>
+                  <a:pt x="183952" y="0"/>
                 </a:moveTo>
                 <a:lnTo>
-                  <a:pt x="231100" y="365760"/>
+                  <a:pt x="183952" y="365760"/>
                 </a:lnTo>
                 <a:lnTo>
                   <a:pt x="0" y="365760"/>
@@ -3717,6 +3727,7 @@
             <a:headEnd type="none"/>
             <a:tailEnd type="none"/>
           </a:ln>
+          <a:effectLst/>
         </p:spPr>
         <p:style>
           <a:lnRef idx="1">
@@ -3748,8 +3759,8 @@
         </p:nvSpPr>
         <p:spPr>
           <a:xfrm>
-            <a:off x="2124729" y="969645"/>
-            <a:ext cx="1092280" cy="548163"/>
+            <a:off x="2148304" y="969645"/>
+            <a:ext cx="1186577" cy="548163"/>
           </a:xfrm>
           <a:custGeom>
             <a:avLst/>
@@ -3758,7 +3769,7 @@
             <a:cxnLst/>
             <a:rect l="l" t="t" r="r" b="b"/>
             <a:pathLst>
-              <a:path w="1092280" h="548163">
+              <a:path w="1186577" h="548163">
                 <a:moveTo>
                   <a:pt x="0" y="0"/>
                 </a:moveTo>
@@ -3766,10 +3777,10 @@
                   <a:pt x="0" y="365760"/>
                 </a:lnTo>
                 <a:lnTo>
-                  <a:pt x="1092280" y="365760"/>
+                  <a:pt x="1186577" y="365760"/>
                 </a:lnTo>
                 <a:lnTo>
-                  <a:pt x="1092280" y="548163"/>
+                  <a:pt x="1186577" y="548163"/>
                 </a:lnTo>
               </a:path>
             </a:pathLst>
@@ -3782,6 +3793,7 @@
             <a:headEnd type="none"/>
             <a:tailEnd type="none"/>
           </a:ln>
+          <a:effectLst/>
         </p:spPr>
         <p:style>
           <a:lnRef idx="1">
@@ -3813,8 +3825,8 @@
         </p:nvSpPr>
         <p:spPr>
           <a:xfrm>
-            <a:off x="2124729" y="969645"/>
-            <a:ext cx="2415659" cy="548163"/>
+            <a:off x="2148304" y="969645"/>
+            <a:ext cx="2557105" cy="548163"/>
           </a:xfrm>
           <a:custGeom>
             <a:avLst/>
@@ -3823,7 +3835,7 @@
             <a:cxnLst/>
             <a:rect l="l" t="t" r="r" b="b"/>
             <a:pathLst>
-              <a:path w="2415659" h="548163">
+              <a:path w="2557105" h="548163">
                 <a:moveTo>
                   <a:pt x="0" y="0"/>
                 </a:moveTo>
@@ -3831,10 +3843,10 @@
                   <a:pt x="0" y="365760"/>
                 </a:lnTo>
                 <a:lnTo>
-                  <a:pt x="2415659" y="365760"/>
+                  <a:pt x="2557105" y="365760"/>
                 </a:lnTo>
                 <a:lnTo>
-                  <a:pt x="2415659" y="548163"/>
+                  <a:pt x="2557105" y="548163"/>
                 </a:lnTo>
               </a:path>
             </a:pathLst>
@@ -3847,6 +3859,7 @@
             <a:headEnd type="none"/>
             <a:tailEnd type="none"/>
           </a:ln>
+          <a:effectLst/>
         </p:spPr>
         <p:style>
           <a:lnRef idx="1">
